--- a/docs/2026-10-23_Aru-демо-клиентка-Айгерим.pptx
+++ b/docs/2026-10-23_Aru-демо-клиентка-Айгерим.pptx
@@ -4279,7 +4279,7 @@
                 <a:ea typeface="Cambria" pitchFamily="34" charset="-122"/>
                 <a:cs typeface="Cambria" pitchFamily="34" charset="-120"/>
               </a:rPr>
-              <a:t>Мягкая осень</a:t>
+              <a:t>Тёмная осень</a:t>
             </a:r>
             <a:endParaRPr lang="en-US" sz="3000" dirty="0"/>
           </a:p>

--- a/docs/2026-10-23_Aru-демо-клиентка-Айгерим.pptx
+++ b/docs/2026-10-23_Aru-демо-клиентка-Айгерим.pptx
@@ -1584,9 +1584,34 @@
           </a:ln>
         </p:spPr>
       </p:sp>
+      <p:sp>
+        <p:nvSpPr>
+          <p:cNvPr id="3" name="Shape 1"/>
+          <p:cNvSpPr/>
+          <p:nvPr/>
+        </p:nvSpPr>
+        <p:spPr>
+          <a:xfrm>
+            <a:off x="5769864" y="420624"/>
+            <a:ext cx="3182112" cy="3959352"/>
+          </a:xfrm>
+          <a:prstGeom prst="rect">
+            <a:avLst/>
+          </a:prstGeom>
+          <a:solidFill>
+            <a:srgbClr val="F3D3DF"/>
+          </a:solidFill>
+          <a:ln w="12700">
+            <a:solidFill>
+              <a:srgbClr val="F3D3DF"/>
+            </a:solidFill>
+            <a:prstDash val="solid"/>
+          </a:ln>
+        </p:spPr>
+      </p:sp>
       <p:pic>
         <p:nvPicPr>
-          <p:cNvPr id="3" name="Image 0" descr="/tmp/claude-0/-home-claude/0f6f79f4-524c-52dc-a6cd-3191363a22d6/scratchpad/face_r.png">    </p:cNvPr>
+          <p:cNvPr id="4" name="Image 0" descr="/tmp/claude-0/-home-claude/0f6f79f4-524c-52dc-a6cd-3191363a22d6/scratchpad/p3/a_face.jpg">    </p:cNvPr>
           <p:cNvPicPr>
             <a:picLocks noChangeAspect="1"/>
           </p:cNvPicPr>
@@ -1610,7 +1635,46 @@
       </p:pic>
       <p:sp>
         <p:nvSpPr>
-          <p:cNvPr id="4" name="Text 0"/>
+          <p:cNvPr id="5" name="Text 2"/>
+          <p:cNvSpPr txBox="1"/>
+          <p:nvPr/>
+        </p:nvSpPr>
+        <p:spPr>
+          <a:xfrm>
+            <a:off x="5806440" y="4434840"/>
+            <a:ext cx="3108960" cy="228600"/>
+          </a:xfrm>
+          <a:prstGeom prst="rect">
+            <a:avLst/>
+          </a:prstGeom>
+          <a:noFill/>
+          <a:ln/>
+        </p:spPr>
+        <p:txBody>
+          <a:bodyPr wrap="square" lIns="0" tIns="0" rIns="0" bIns="0" rtlCol="0" anchor="t"/>
+          <a:lstStyle/>
+          <a:p>
+            <a:pPr algn="ctr" indent="0" marL="0">
+              <a:buNone/>
+            </a:pPr>
+            <a:r>
+              <a:rPr lang="en-US" sz="900" dirty="0">
+                <a:solidFill>
+                  <a:srgbClr val="D9AFC0"/>
+                </a:solidFill>
+                <a:latin typeface="Calibri" pitchFamily="34" charset="0"/>
+                <a:ea typeface="Calibri" pitchFamily="34" charset="-122"/>
+                <a:cs typeface="Calibri" pitchFamily="34" charset="-120"/>
+              </a:rPr>
+              <a:t>Изображение создано ИИ</a:t>
+            </a:r>
+            <a:endParaRPr lang="en-US" sz="900" dirty="0"/>
+          </a:p>
+        </p:txBody>
+      </p:sp>
+      <p:sp>
+        <p:nvSpPr>
+          <p:cNvPr id="6" name="Text 0"/>
           <p:cNvSpPr/>
           <p:nvPr>
             <p:ph idx="100" type="title" hasCustomPrompt="1"/>
@@ -1651,7 +1715,7 @@
       </p:sp>
       <p:sp>
         <p:nvSpPr>
-          <p:cNvPr id="5" name="Text 2"/>
+          <p:cNvPr id="7" name="Text 4"/>
           <p:cNvSpPr txBox="1"/>
           <p:nvPr/>
         </p:nvSpPr>
@@ -1690,7 +1754,7 @@
       </p:sp>
       <p:sp>
         <p:nvSpPr>
-          <p:cNvPr id="6" name="Text 3"/>
+          <p:cNvPr id="8" name="Text 5"/>
           <p:cNvSpPr txBox="1"/>
           <p:nvPr/>
         </p:nvSpPr>
@@ -1795,7 +1859,7 @@
       </p:sp>
       <p:pic>
         <p:nvPicPr>
-          <p:cNvPr id="3" name="Image 0" descr="/tmp/claude-0/-home-claude/0f6f79f4-524c-52dc-a6cd-3191363a22d6/scratchpad/body_r.png">    </p:cNvPr>
+          <p:cNvPr id="3" name="Image 0" descr="/home/claude/aru/demo/photos/aigerim-full.jpg">    </p:cNvPr>
           <p:cNvPicPr>
             <a:picLocks noChangeAspect="1"/>
           </p:cNvPicPr>
@@ -1810,7 +1874,7 @@
         <p:spPr>
           <a:xfrm>
             <a:off x="548640" y="1097280"/>
-            <a:ext cx="1645920" cy="3703320"/>
+            <a:ext cx="1645920" cy="3584448"/>
           </a:xfrm>
           <a:prstGeom prst="rect">
             <a:avLst/>
@@ -2550,7 +2614,7 @@
       </p:sp>
       <p:pic>
         <p:nvPicPr>
-          <p:cNvPr id="3" name="Image 0" descr="/tmp/claude-0/-home-claude/0f6f79f4-524c-52dc-a6cd-3191363a22d6/scratchpad/face_r.png">    </p:cNvPr>
+          <p:cNvPr id="3" name="Image 0" descr="/tmp/claude-0/-home-claude/0f6f79f4-524c-52dc-a6cd-3191363a22d6/scratchpad/p3/a_tq.jpg">    </p:cNvPr>
           <p:cNvPicPr>
             <a:picLocks noChangeAspect="1"/>
           </p:cNvPicPr>
@@ -2722,7 +2786,7 @@
                 <a:ea typeface="Calibri" pitchFamily="34" charset="-122"/>
                 <a:cs typeface="Calibri" pitchFamily="34" charset="-120"/>
               </a:rPr>
-              <a:t>Тёплый тёмный каштан, на солнце медный отлив, до лопаток</a:t>
+              <a:t>Тёплый тёмный каштан, прямые, ниже плеч</a:t>
             </a:r>
             <a:endParaRPr lang="en-US" sz="1300" dirty="0"/>
           </a:p>
@@ -2800,7 +2864,7 @@
                 <a:ea typeface="Calibri" pitchFamily="34" charset="-122"/>
                 <a:cs typeface="Calibri" pitchFamily="34" charset="-120"/>
               </a:rPr>
-              <a:t>Ореховые с золотыми крапинками, миндалевидный разрез</a:t>
+              <a:t>Карие, тёплые, миндалевидный разрез</a:t>
             </a:r>
             <a:endParaRPr lang="en-US" sz="1300" dirty="0"/>
           </a:p>
@@ -4784,7 +4848,7 @@
                 <a:ea typeface="Calibri" pitchFamily="34" charset="-122"/>
                 <a:cs typeface="Calibri" pitchFamily="34" charset="-120"/>
               </a:rPr>
-              <a:t>Удлинённое каре с волной; оттенки — золотистый каштан, карамель</a:t>
+              <a:t>Мягкие волны ниже плеч; оттенок — тёплый тёмный каштан</a:t>
             </a:r>
             <a:endParaRPr lang="en-US" sz="1250" dirty="0"/>
           </a:p>
@@ -5099,7 +5163,7 @@
                 <a:ea typeface="Calibri" pitchFamily="34" charset="-122"/>
                 <a:cs typeface="Calibri" pitchFamily="34" charset="-120"/>
               </a:rPr>
-              <a:t>Жакет кэмел, блуза беж, брюки шоколад, золотые серьги</a:t>
+              <a:t>Жакет шоколад, блуза горчица, брюки олива, бежевые лодочки</a:t>
             </a:r>
             <a:endParaRPr lang="en-US" sz="1250" dirty="0"/>
           </a:p>
@@ -5270,7 +5334,7 @@
                 <a:ea typeface="Calibri" pitchFamily="34" charset="-122"/>
                 <a:cs typeface="Calibri" pitchFamily="34" charset="-120"/>
               </a:rPr>
-              <a:t>Как показать вживую</a:t>
+              <a:t>Как увидеть вживую</a:t>
             </a:r>
             <a:endParaRPr lang="en-US" sz="1300" dirty="0"/>
           </a:p>
@@ -5287,7 +5351,7 @@
                 <a:ea typeface="Calibri" pitchFamily="34" charset="-122"/>
                 <a:cs typeface="Calibri" pitchFamily="34" charset="-120"/>
               </a:rPr>
-              <a:t>Откройте прототип, нажмите «Войти», затем «Показать на демо-клиентке Айгерим» и «Сделать разбор».</a:t>
+              <a:t>Лендинг Aru → «Посмотрите, как это работает» → Айгерим → кнопка «Как было / Как стало».</a:t>
             </a:r>
             <a:endParaRPr lang="en-US" sz="1300" dirty="0"/>
           </a:p>
@@ -5401,7 +5465,7 @@
                 <a:ea typeface="Cambria" pitchFamily="34" charset="-122"/>
                 <a:cs typeface="Cambria" pitchFamily="34" charset="-120"/>
               </a:rPr>
-              <a:t>Реалистичное фото: промпт для ChatGPT</a:t>
+              <a:t>Её образы: как было и как стало</a:t>
             </a:r>
             <a:endParaRPr lang="en-US" sz="2800" dirty="0"/>
           </a:p>
@@ -5416,11 +5480,118 @@
         <p:spPr>
           <a:xfrm>
             <a:off x="548640" y="1097280"/>
-            <a:ext cx="3886200" cy="3246120"/>
+            <a:ext cx="3931920" cy="1691640"/>
           </a:xfrm>
           <a:prstGeom prst="roundRect">
             <a:avLst>
-              <a:gd name="adj" fmla="val 3380"/>
+              <a:gd name="adj" fmla="val 6486"/>
+            </a:avLst>
+          </a:prstGeom>
+          <a:solidFill>
+            <a:srgbClr val="FCEFD9"/>
+          </a:solidFill>
+          <a:ln w="12700">
+            <a:solidFill>
+              <a:srgbClr val="FCEFD9"/>
+            </a:solidFill>
+            <a:prstDash val="solid"/>
+          </a:ln>
+        </p:spPr>
+      </p:sp>
+      <p:pic>
+        <p:nvPicPr>
+          <p:cNvPr id="4" name="Image 0" descr="/tmp/claude-0/-home-claude/0f6f79f4-524c-52dc-a6cd-3191363a22d6/scratchpad/p3/a0.jpg">    </p:cNvPr>
+          <p:cNvPicPr>
+            <a:picLocks noChangeAspect="1"/>
+          </p:cNvPicPr>
+          <p:nvPr/>
+        </p:nvPicPr>
+        <p:blipFill>
+          <a:blip r:embed="rId1"/>
+          <a:stretch>
+            <a:fillRect/>
+          </a:stretch>
+        </p:blipFill>
+        <p:spPr>
+          <a:xfrm>
+            <a:off x="640080" y="1188720"/>
+            <a:ext cx="2267712" cy="1508760"/>
+          </a:xfrm>
+          <a:prstGeom prst="rect">
+            <a:avLst/>
+          </a:prstGeom>
+        </p:spPr>
+      </p:pic>
+      <p:sp>
+        <p:nvSpPr>
+          <p:cNvPr id="5" name="Text 2"/>
+          <p:cNvSpPr txBox="1"/>
+          <p:nvPr/>
+        </p:nvSpPr>
+        <p:spPr>
+          <a:xfrm>
+            <a:off x="3035808" y="1261872"/>
+            <a:ext cx="1353312" cy="1417320"/>
+          </a:xfrm>
+          <a:prstGeom prst="rect">
+            <a:avLst/>
+          </a:prstGeom>
+          <a:noFill/>
+          <a:ln/>
+        </p:spPr>
+        <p:txBody>
+          <a:bodyPr wrap="square" lIns="0" tIns="0" rIns="0" bIns="0" rtlCol="0" anchor="t"/>
+          <a:lstStyle/>
+          <a:p>
+            <a:pPr indent="0" marL="0">
+              <a:buNone/>
+            </a:pPr>
+            <a:r>
+              <a:rPr lang="en-US" sz="1400" b="1" dirty="0">
+                <a:solidFill>
+                  <a:srgbClr val="9A6A12"/>
+                </a:solidFill>
+                <a:latin typeface="Calibri" pitchFamily="34" charset="0"/>
+                <a:ea typeface="Calibri" pitchFamily="34" charset="-122"/>
+                <a:cs typeface="Calibri" pitchFamily="34" charset="-120"/>
+              </a:rPr>
+              <a:t>Как было</a:t>
+            </a:r>
+            <a:endParaRPr lang="en-US" sz="1400" dirty="0"/>
+          </a:p>
+          <a:p>
+            <a:pPr indent="0" marL="0">
+              <a:buNone/>
+            </a:pPr>
+            <a:r>
+              <a:rPr lang="en-US" sz="1100" dirty="0">
+                <a:solidFill>
+                  <a:srgbClr val="2B1A22"/>
+                </a:solidFill>
+                <a:latin typeface="Calibri" pitchFamily="34" charset="0"/>
+                <a:ea typeface="Calibri" pitchFamily="34" charset="-122"/>
+                <a:cs typeface="Calibri" pitchFamily="34" charset="-120"/>
+              </a:rPr>
+              <a:t>Серый трикотаж, тёмные брюки — лицо выглядит тусклее</a:t>
+            </a:r>
+            <a:endParaRPr lang="en-US" sz="1400" dirty="0"/>
+          </a:p>
+        </p:txBody>
+      </p:sp>
+      <p:sp>
+        <p:nvSpPr>
+          <p:cNvPr id="6" name="Shape 3"/>
+          <p:cNvSpPr/>
+          <p:nvPr/>
+        </p:nvSpPr>
+        <p:spPr>
+          <a:xfrm>
+            <a:off x="4663440" y="1097280"/>
+            <a:ext cx="3931920" cy="1691640"/>
+          </a:xfrm>
+          <a:prstGeom prst="roundRect">
+            <a:avLst>
+              <a:gd name="adj" fmla="val 6486"/>
             </a:avLst>
           </a:prstGeom>
           <a:solidFill>
@@ -5434,16 +5605,40 @@
           </a:ln>
         </p:spPr>
       </p:sp>
-      <p:sp>
-        <p:nvSpPr>
-          <p:cNvPr id="4" name="Text 2"/>
+      <p:pic>
+        <p:nvPicPr>
+          <p:cNvPr id="7" name="Image 1" descr="/tmp/claude-0/-home-claude/0f6f79f4-524c-52dc-a6cd-3191363a22d6/scratchpad/p3/aw.jpg">    </p:cNvPr>
+          <p:cNvPicPr>
+            <a:picLocks noChangeAspect="1"/>
+          </p:cNvPicPr>
+          <p:nvPr/>
+        </p:nvPicPr>
+        <p:blipFill>
+          <a:blip r:embed="rId2"/>
+          <a:stretch>
+            <a:fillRect/>
+          </a:stretch>
+        </p:blipFill>
+        <p:spPr>
+          <a:xfrm>
+            <a:off x="4754880" y="1188720"/>
+            <a:ext cx="2267712" cy="1508760"/>
+          </a:xfrm>
+          <a:prstGeom prst="rect">
+            <a:avLst/>
+          </a:prstGeom>
+        </p:spPr>
+      </p:pic>
+      <p:sp>
+        <p:nvSpPr>
+          <p:cNvPr id="8" name="Text 4"/>
           <p:cNvSpPr txBox="1"/>
           <p:nvPr/>
         </p:nvSpPr>
         <p:spPr>
           <a:xfrm>
-            <a:off x="731520" y="1234440"/>
-            <a:ext cx="3566160" cy="320040"/>
+            <a:off x="7150608" y="1261872"/>
+            <a:ext cx="1353312" cy="1417320"/>
           </a:xfrm>
           <a:prstGeom prst="rect">
             <a:avLst/>
@@ -5459,46 +5654,24 @@
               <a:buNone/>
             </a:pPr>
             <a:r>
-              <a:rPr lang="en-US" sz="1500" b="1" dirty="0">
-                <a:solidFill>
-                  <a:srgbClr val="C2456E"/>
-                </a:solidFill>
-                <a:latin typeface="Calibri" pitchFamily="34" charset="0"/>
-                <a:ea typeface="Calibri" pitchFamily="34" charset="-122"/>
-                <a:cs typeface="Calibri" pitchFamily="34" charset="-120"/>
-              </a:rPr>
-              <a:t>Портрет</a:t>
-            </a:r>
-            <a:endParaRPr lang="en-US" sz="1500" dirty="0"/>
-          </a:p>
-        </p:txBody>
-      </p:sp>
-      <p:sp>
-        <p:nvSpPr>
-          <p:cNvPr id="5" name="Text 3"/>
-          <p:cNvSpPr txBox="1"/>
-          <p:nvPr/>
-        </p:nvSpPr>
-        <p:spPr>
-          <a:xfrm>
-            <a:off x="731520" y="1600200"/>
-            <a:ext cx="3520440" cy="2651760"/>
-          </a:xfrm>
-          <a:prstGeom prst="rect">
-            <a:avLst/>
-          </a:prstGeom>
-          <a:noFill/>
-          <a:ln/>
-        </p:spPr>
-        <p:txBody>
-          <a:bodyPr wrap="square" lIns="0" tIns="0" rIns="0" bIns="0" rtlCol="0" anchor="t"/>
-          <a:lstStyle/>
-          <a:p>
-            <a:pPr indent="0" marL="0">
-              <a:buNone/>
-            </a:pPr>
-            <a:r>
-              <a:rPr lang="en-US" sz="1150" dirty="0">
+              <a:rPr lang="en-US" sz="1400" b="1" dirty="0">
+                <a:solidFill>
+                  <a:srgbClr val="6D2E46"/>
+                </a:solidFill>
+                <a:latin typeface="Calibri" pitchFamily="34" charset="0"/>
+                <a:ea typeface="Calibri" pitchFamily="34" charset="-122"/>
+                <a:cs typeface="Calibri" pitchFamily="34" charset="-120"/>
+              </a:rPr>
+              <a:t>Работа</a:t>
+            </a:r>
+            <a:endParaRPr lang="en-US" sz="1400" dirty="0"/>
+          </a:p>
+          <a:p>
+            <a:pPr indent="0" marL="0">
+              <a:buNone/>
+            </a:pPr>
+            <a:r>
+              <a:rPr lang="en-US" sz="1100" dirty="0">
                 <a:solidFill>
                   <a:srgbClr val="2B1A22"/>
                 </a:solidFill>
@@ -5506,26 +5679,26 @@
                 <a:ea typeface="Calibri" pitchFamily="34" charset="-122"/>
                 <a:cs typeface="Calibri" pitchFamily="34" charset="-120"/>
               </a:rPr>
-              <a:t>Photorealistic portrait photo of a 28-year-old Kazakh woman, natural daylight from a window, no makeup, no filters, plain light grey wall, shoulders visible, plain greige T-shirt. Oval face with high cheekbones, almond-shaped hazel eyes with golden flecks, warm honey-beige skin with a golden undertone, straight warm dark-chestnut hair to the shoulder blades with a subtle copper sheen, middle part, soft dark-brown brows. Calm friendly expression, looking at the camera, 4:5.</a:t>
-            </a:r>
-            <a:endParaRPr lang="en-US" sz="1150" dirty="0"/>
-          </a:p>
-        </p:txBody>
-      </p:sp>
-      <p:sp>
-        <p:nvSpPr>
-          <p:cNvPr id="6" name="Shape 4"/>
+              <a:t>Жакет шоколад, блуза горчица, брюки олива</a:t>
+            </a:r>
+            <a:endParaRPr lang="en-US" sz="1400" dirty="0"/>
+          </a:p>
+        </p:txBody>
+      </p:sp>
+      <p:sp>
+        <p:nvSpPr>
+          <p:cNvPr id="9" name="Shape 5"/>
           <p:cNvSpPr/>
           <p:nvPr/>
         </p:nvSpPr>
         <p:spPr>
           <a:xfrm>
-            <a:off x="4617720" y="1097280"/>
-            <a:ext cx="3886200" cy="3246120"/>
+            <a:off x="548640" y="2926080"/>
+            <a:ext cx="3931920" cy="1691640"/>
           </a:xfrm>
           <a:prstGeom prst="roundRect">
             <a:avLst>
-              <a:gd name="adj" fmla="val 3380"/>
+              <a:gd name="adj" fmla="val 6486"/>
             </a:avLst>
           </a:prstGeom>
           <a:solidFill>
@@ -5539,16 +5712,40 @@
           </a:ln>
         </p:spPr>
       </p:sp>
-      <p:sp>
-        <p:nvSpPr>
-          <p:cNvPr id="7" name="Text 5"/>
+      <p:pic>
+        <p:nvPicPr>
+          <p:cNvPr id="10" name="Image 2" descr="/tmp/claude-0/-home-claude/0f6f79f4-524c-52dc-a6cd-3191363a22d6/scratchpad/p3/ap.jpg">    </p:cNvPr>
+          <p:cNvPicPr>
+            <a:picLocks noChangeAspect="1"/>
+          </p:cNvPicPr>
+          <p:nvPr/>
+        </p:nvPicPr>
+        <p:blipFill>
+          <a:blip r:embed="rId3"/>
+          <a:stretch>
+            <a:fillRect/>
+          </a:stretch>
+        </p:blipFill>
+        <p:spPr>
+          <a:xfrm>
+            <a:off x="640080" y="3017520"/>
+            <a:ext cx="2267712" cy="1508760"/>
+          </a:xfrm>
+          <a:prstGeom prst="rect">
+            <a:avLst/>
+          </a:prstGeom>
+        </p:spPr>
+      </p:pic>
+      <p:sp>
+        <p:nvSpPr>
+          <p:cNvPr id="11" name="Text 6"/>
           <p:cNvSpPr txBox="1"/>
           <p:nvPr/>
         </p:nvSpPr>
         <p:spPr>
           <a:xfrm>
-            <a:off x="4800600" y="1234440"/>
-            <a:ext cx="3566160" cy="320040"/>
+            <a:off x="3035808" y="3090672"/>
+            <a:ext cx="1353312" cy="1417320"/>
           </a:xfrm>
           <a:prstGeom prst="rect">
             <a:avLst/>
@@ -5564,30 +5761,98 @@
               <a:buNone/>
             </a:pPr>
             <a:r>
-              <a:rPr lang="en-US" sz="1500" b="1" dirty="0">
-                <a:solidFill>
-                  <a:srgbClr val="C2456E"/>
-                </a:solidFill>
-                <a:latin typeface="Calibri" pitchFamily="34" charset="0"/>
-                <a:ea typeface="Calibri" pitchFamily="34" charset="-122"/>
-                <a:cs typeface="Calibri" pitchFamily="34" charset="-120"/>
-              </a:rPr>
-              <a:t>Полный рост</a:t>
-            </a:r>
-            <a:endParaRPr lang="en-US" sz="1500" dirty="0"/>
-          </a:p>
-        </p:txBody>
-      </p:sp>
-      <p:sp>
-        <p:nvSpPr>
-          <p:cNvPr id="8" name="Text 6"/>
+              <a:rPr lang="en-US" sz="1400" b="1" dirty="0">
+                <a:solidFill>
+                  <a:srgbClr val="6D2E46"/>
+                </a:solidFill>
+                <a:latin typeface="Calibri" pitchFamily="34" charset="0"/>
+                <a:ea typeface="Calibri" pitchFamily="34" charset="-122"/>
+                <a:cs typeface="Calibri" pitchFamily="34" charset="-120"/>
+              </a:rPr>
+              <a:t>Праздник</a:t>
+            </a:r>
+            <a:endParaRPr lang="en-US" sz="1400" dirty="0"/>
+          </a:p>
+          <a:p>
+            <a:pPr indent="0" marL="0">
+              <a:buNone/>
+            </a:pPr>
+            <a:r>
+              <a:rPr lang="en-US" sz="1100" dirty="0">
+                <a:solidFill>
+                  <a:srgbClr val="2B1A22"/>
+                </a:solidFill>
+                <a:latin typeface="Calibri" pitchFamily="34" charset="0"/>
+                <a:ea typeface="Calibri" pitchFamily="34" charset="-122"/>
+                <a:cs typeface="Calibri" pitchFamily="34" charset="-120"/>
+              </a:rPr>
+              <a:t>Платье миди марсала, золотые украшения</a:t>
+            </a:r>
+            <a:endParaRPr lang="en-US" sz="1400" dirty="0"/>
+          </a:p>
+        </p:txBody>
+      </p:sp>
+      <p:sp>
+        <p:nvSpPr>
+          <p:cNvPr id="12" name="Shape 7"/>
+          <p:cNvSpPr/>
+          <p:nvPr/>
+        </p:nvSpPr>
+        <p:spPr>
+          <a:xfrm>
+            <a:off x="4663440" y="2926080"/>
+            <a:ext cx="3931920" cy="1691640"/>
+          </a:xfrm>
+          <a:prstGeom prst="roundRect">
+            <a:avLst>
+              <a:gd name="adj" fmla="val 6486"/>
+            </a:avLst>
+          </a:prstGeom>
+          <a:solidFill>
+            <a:srgbClr val="F7E6EC"/>
+          </a:solidFill>
+          <a:ln w="12700">
+            <a:solidFill>
+              <a:srgbClr val="F7E6EC"/>
+            </a:solidFill>
+            <a:prstDash val="solid"/>
+          </a:ln>
+        </p:spPr>
+      </p:sp>
+      <p:pic>
+        <p:nvPicPr>
+          <p:cNvPr id="13" name="Image 3" descr="/tmp/claude-0/-home-claude/0f6f79f4-524c-52dc-a6cd-3191363a22d6/scratchpad/p3/awe.jpg">    </p:cNvPr>
+          <p:cNvPicPr>
+            <a:picLocks noChangeAspect="1"/>
+          </p:cNvPicPr>
+          <p:nvPr/>
+        </p:nvPicPr>
+        <p:blipFill>
+          <a:blip r:embed="rId4"/>
+          <a:stretch>
+            <a:fillRect/>
+          </a:stretch>
+        </p:blipFill>
+        <p:spPr>
+          <a:xfrm>
+            <a:off x="4754880" y="3017520"/>
+            <a:ext cx="2267712" cy="1508760"/>
+          </a:xfrm>
+          <a:prstGeom prst="rect">
+            <a:avLst/>
+          </a:prstGeom>
+        </p:spPr>
+      </p:pic>
+      <p:sp>
+        <p:nvSpPr>
+          <p:cNvPr id="14" name="Text 8"/>
           <p:cNvSpPr txBox="1"/>
           <p:nvPr/>
         </p:nvSpPr>
         <p:spPr>
           <a:xfrm>
-            <a:off x="4800600" y="1600200"/>
-            <a:ext cx="3520440" cy="2651760"/>
+            <a:off x="7150608" y="3090672"/>
+            <a:ext cx="1353312" cy="1417320"/>
           </a:xfrm>
           <a:prstGeom prst="rect">
             <a:avLst/>
@@ -5603,7 +5868,24 @@
               <a:buNone/>
             </a:pPr>
             <a:r>
-              <a:rPr lang="en-US" sz="1150" dirty="0">
+              <a:rPr lang="en-US" sz="1400" b="1" dirty="0">
+                <a:solidFill>
+                  <a:srgbClr val="6D2E46"/>
+                </a:solidFill>
+                <a:latin typeface="Calibri" pitchFamily="34" charset="0"/>
+                <a:ea typeface="Calibri" pitchFamily="34" charset="-122"/>
+                <a:cs typeface="Calibri" pitchFamily="34" charset="-120"/>
+              </a:rPr>
+              <a:t>Выходной</a:t>
+            </a:r>
+            <a:endParaRPr lang="en-US" sz="1400" dirty="0"/>
+          </a:p>
+          <a:p>
+            <a:pPr indent="0" marL="0">
+              <a:buNone/>
+            </a:pPr>
+            <a:r>
+              <a:rPr lang="en-US" sz="1100" dirty="0">
                 <a:solidFill>
                   <a:srgbClr val="2B1A22"/>
                 </a:solidFill>
@@ -5611,22 +5893,22 @@
                 <a:ea typeface="Calibri" pitchFamily="34" charset="-122"/>
                 <a:cs typeface="Calibri" pitchFamily="34" charset="-120"/>
               </a:rPr>
-              <a:t>Full-length photo of the same woman, 165 cm tall, average build with a defined waist (hourglass), fitted plain greige long-sleeve top and fitted chocolate-brown trousers, standing straight with arms down, plain light grey wall, natural daylight, camera at waist height, whole body visible from head to toe, 2:3.</a:t>
-            </a:r>
-            <a:endParaRPr lang="en-US" sz="1150" dirty="0"/>
-          </a:p>
-        </p:txBody>
-      </p:sp>
-      <p:sp>
-        <p:nvSpPr>
-          <p:cNvPr id="9" name="Text 7"/>
+              <a:t>Свитер терракота, шарф цвета хвои, тёмный деним</a:t>
+            </a:r>
+            <a:endParaRPr lang="en-US" sz="1400" dirty="0"/>
+          </a:p>
+        </p:txBody>
+      </p:sp>
+      <p:sp>
+        <p:nvSpPr>
+          <p:cNvPr id="15" name="Text 9"/>
           <p:cNvSpPr txBox="1"/>
           <p:nvPr/>
         </p:nvSpPr>
         <p:spPr>
           <a:xfrm>
-            <a:off x="548640" y="4526280"/>
-            <a:ext cx="7772400" cy="274320"/>
+            <a:off x="548640" y="4773168"/>
+            <a:ext cx="7772400" cy="256032"/>
           </a:xfrm>
           <a:prstGeom prst="rect">
             <a:avLst/>
@@ -5642,7 +5924,7 @@
               <a:buNone/>
             </a:pPr>
             <a:r>
-              <a:rPr lang="en-US" sz="1200" dirty="0">
+              <a:rPr lang="en-US" sz="1100" dirty="0">
                 <a:solidFill>
                   <a:srgbClr val="7A6470"/>
                 </a:solidFill>
@@ -5650,9 +5932,9 @@
                 <a:ea typeface="Calibri" pitchFamily="34" charset="-122"/>
                 <a:cs typeface="Calibri" pitchFamily="34" charset="-120"/>
               </a:rPr>
-              <a:t>Скопируйте текст в ChatGPT. Полученные фото можно загрузить в прототип вместо рисунков.</a:t>
-            </a:r>
-            <a:endParaRPr lang="en-US" sz="1200" dirty="0"/>
+              <a:t>Примерка сделана в Gemini по исходному фото: лицо, фигура и фон сохранены. Изображения созданы ИИ.</a:t>
+            </a:r>
+            <a:endParaRPr lang="en-US" sz="1100" dirty="0"/>
           </a:p>
         </p:txBody>
       </p:sp>
